--- a/Training Materials/12. Design Patterns in Java/Slides/5. Getting to Know the Creational Design Patterns/getting-to-know-the-creational-design-patterns-slides.pptx
+++ b/Training Materials/12. Design Patterns in Java/Slides/5. Getting to Know the Creational Design Patterns/getting-to-know-the-creational-design-patterns-slides.pptx
@@ -264,7 +264,7 @@
           <a:p>
             <a:fld id="{462A4CFA-BDF2-4405-8004-133B1F8FF2F0}" type="datetimeFigureOut">
               <a:rPr lang="en-IN" smtClean="0"/>
-              <a:t>18-09-2024</a:t>
+              <a:t>22-10-2025</a:t>
             </a:fld>
             <a:endParaRPr lang="en-IN"/>
           </a:p>
@@ -671,7 +671,7 @@
           <a:p>
             <a:fld id="{3719F783-2559-48DB-952B-9EC9DF8E963E}" type="datetime1">
               <a:rPr lang="en-US" smtClean="0"/>
-              <a:t>9/18/2024</a:t>
+              <a:t>10/22/2025</a:t>
             </a:fld>
             <a:endParaRPr lang="en-US"/>
           </a:p>
@@ -848,7 +848,7 @@
           <a:p>
             <a:fld id="{B06FA33D-746E-4044-8895-2D3860EC2415}" type="datetime1">
               <a:rPr lang="en-US" smtClean="0"/>
-              <a:t>9/18/2024</a:t>
+              <a:t>10/22/2025</a:t>
             </a:fld>
             <a:endParaRPr lang="en-US"/>
           </a:p>
@@ -1062,7 +1062,7 @@
           <a:p>
             <a:fld id="{192583EC-C669-45CB-9F10-2717914C48E9}" type="datetime1">
               <a:rPr lang="en-US" smtClean="0"/>
-              <a:t>9/18/2024</a:t>
+              <a:t>10/22/2025</a:t>
             </a:fld>
             <a:endParaRPr lang="en-US"/>
           </a:p>
@@ -1210,7 +1210,7 @@
           <a:p>
             <a:fld id="{03234270-66E5-49BC-837F-75C1B977FE6C}" type="datetime1">
               <a:rPr lang="en-US" smtClean="0"/>
-              <a:t>9/18/2024</a:t>
+              <a:t>10/22/2025</a:t>
             </a:fld>
             <a:endParaRPr lang="en-US"/>
           </a:p>
@@ -1329,7 +1329,7 @@
           <a:p>
             <a:fld id="{91700404-3E76-44A9-8969-9195EE373955}" type="datetime1">
               <a:rPr lang="en-US" smtClean="0"/>
-              <a:t>9/18/2024</a:t>
+              <a:t>10/22/2025</a:t>
             </a:fld>
             <a:endParaRPr lang="en-US"/>
           </a:p>
@@ -1554,7 +1554,7 @@
           <a:p>
             <a:fld id="{B891A5E5-75A6-4E42-9347-8F9CFADC5782}" type="datetime1">
               <a:rPr lang="en-US" smtClean="0"/>
-              <a:t>9/18/2024</a:t>
+              <a:t>10/22/2025</a:t>
             </a:fld>
             <a:endParaRPr lang="en-US"/>
           </a:p>
@@ -42759,7 +42759,7 @@
         </p:nvSpPr>
         <p:spPr>
           <a:xfrm>
-            <a:off x="2375154" y="3562350"/>
+            <a:off x="2465705" y="3505200"/>
             <a:ext cx="7260590" cy="0"/>
           </a:xfrm>
           <a:custGeom>
